--- a/slides/39 - Baldur - example presentation.pptx
+++ b/slides/39 - Baldur - example presentation.pptx
@@ -1798,7 +1798,7 @@
                 <a:ea typeface="Calibri" pitchFamily="34" charset="-122"/>
                 <a:cs typeface="Calibri" pitchFamily="34" charset="-120"/>
               </a:rPr>
-              <a:t>PAPER PRESENTATION · READING #39 · SESSION 17</a:t>
+              <a:t>PAPER PRESENTATION · READING #39 · SESSION 13 · PAIRED WITH #40 DRAFT, SKETCH &amp; PROVE</a:t>
             </a:r>
             <a:endParaRPr lang="en-US" sz="1300" dirty="0"/>
           </a:p>
@@ -2005,7 +2005,7 @@
                 <a:ea typeface="Calibri" pitchFamily="34" charset="-122"/>
                 <a:cs typeface="Calibri" pitchFamily="34" charset="-120"/>
               </a:rPr>
-              <a:t>  ·  Tue Mar 2, 2027</a:t>
+              <a:t>  ·  Thu Feb 18, 2027</a:t>
             </a:r>
             <a:endParaRPr lang="en-US" sz="1500" dirty="0"/>
           </a:p>
